--- a/80_Docu/DRIFT_Presi.pptx
+++ b/80_Docu/DRIFT_Presi.pptx
@@ -5,48 +5,49 @@
     <p:sldMasterId id="2147483648" r:id="rId4"/>
   </p:sldMasterIdLst>
   <p:notesMasterIdLst>
-    <p:notesMasterId r:id="rId15"/>
+    <p:notesMasterId r:id="rId16"/>
   </p:notesMasterIdLst>
   <p:sldIdLst>
     <p:sldId id="267" r:id="rId5"/>
-    <p:sldId id="299" r:id="rId6"/>
-    <p:sldId id="307" r:id="rId7"/>
-    <p:sldId id="302" r:id="rId8"/>
-    <p:sldId id="301" r:id="rId9"/>
-    <p:sldId id="303" r:id="rId10"/>
-    <p:sldId id="308" r:id="rId11"/>
-    <p:sldId id="309" r:id="rId12"/>
-    <p:sldId id="310" r:id="rId13"/>
-    <p:sldId id="277" r:id="rId14"/>
+    <p:sldId id="307" r:id="rId6"/>
+    <p:sldId id="311" r:id="rId7"/>
+    <p:sldId id="301" r:id="rId8"/>
+    <p:sldId id="314" r:id="rId9"/>
+    <p:sldId id="312" r:id="rId10"/>
+    <p:sldId id="303" r:id="rId11"/>
+    <p:sldId id="313" r:id="rId12"/>
+    <p:sldId id="308" r:id="rId13"/>
+    <p:sldId id="310" r:id="rId14"/>
+    <p:sldId id="277" r:id="rId15"/>
   </p:sldIdLst>
   <p:sldSz cx="12192000" cy="6858000"/>
   <p:notesSz cx="6858000" cy="9144000"/>
   <p:embeddedFontLst>
     <p:embeddedFont>
       <p:font typeface="Acumin Pro Condensed Semibold" panose="020B0706020202020204" pitchFamily="34" charset="77"/>
-      <p:regular r:id="rId16"/>
-      <p:bold r:id="rId17"/>
-      <p:italic r:id="rId18"/>
-      <p:boldItalic r:id="rId19"/>
+      <p:regular r:id="rId17"/>
+      <p:bold r:id="rId18"/>
+      <p:italic r:id="rId19"/>
+      <p:boldItalic r:id="rId20"/>
     </p:embeddedFont>
     <p:embeddedFont>
       <p:font typeface="Acumin Pro Medium" panose="020B0604020202020204" pitchFamily="34" charset="77"/>
-      <p:regular r:id="rId20"/>
-      <p:italic r:id="rId21"/>
+      <p:regular r:id="rId21"/>
+      <p:italic r:id="rId22"/>
     </p:embeddedFont>
     <p:embeddedFont>
       <p:font typeface="Franklin Gothic Book" panose="020B0503020102020204" pitchFamily="34" charset="0"/>
-      <p:regular r:id="rId22"/>
-      <p:italic r:id="rId23"/>
+      <p:regular r:id="rId23"/>
+      <p:italic r:id="rId24"/>
     </p:embeddedFont>
     <p:embeddedFont>
       <p:font typeface="Franklin Gothic Medium" panose="020B0603020102020204" pitchFamily="34" charset="0"/>
-      <p:regular r:id="rId24"/>
-      <p:italic r:id="rId25"/>
+      <p:regular r:id="rId25"/>
+      <p:italic r:id="rId26"/>
     </p:embeddedFont>
     <p:embeddedFont>
       <p:font typeface="Franklin Gothic Medium Cond" panose="020B0606030402020204" pitchFamily="34" charset="0"/>
-      <p:regular r:id="rId26"/>
+      <p:regular r:id="rId27"/>
     </p:embeddedFont>
   </p:embeddedFontLst>
   <p:defaultTextStyle>
@@ -251,7 +252,7 @@
           <a:p>
             <a:fld id="{01926CF7-48D8-2F46-AFC8-8A5D2298DFDD}" type="datetimeFigureOut">
               <a:rPr lang="en-US" smtClean="0"/>
-              <a:t>5/6/26</a:t>
+              <a:t>5/8/26</a:t>
             </a:fld>
             <a:endParaRPr lang="en-US"/>
           </a:p>
@@ -13883,6 +13884,212 @@
   <p:cSld>
     <p:spTree>
       <p:nvGrpSpPr>
+        <p:cNvPr id="1" name="">
+          <a:extLst>
+            <a:ext uri="{FF2B5EF4-FFF2-40B4-BE49-F238E27FC236}">
+              <a16:creationId xmlns:a16="http://schemas.microsoft.com/office/drawing/2014/main" id="{67A0456B-2C30-6344-D744-EB0E6749858B}"/>
+            </a:ext>
+          </a:extLst>
+        </p:cNvPr>
+        <p:cNvGrpSpPr/>
+        <p:nvPr/>
+      </p:nvGrpSpPr>
+      <p:grpSpPr>
+        <a:xfrm>
+          <a:off x="0" y="0"/>
+          <a:ext cx="0" cy="0"/>
+          <a:chOff x="0" y="0"/>
+          <a:chExt cx="0" cy="0"/>
+        </a:xfrm>
+      </p:grpSpPr>
+      <p:sp>
+        <p:nvSpPr>
+          <p:cNvPr id="2" name="Content Placeholder 1">
+            <a:extLst>
+              <a:ext uri="{FF2B5EF4-FFF2-40B4-BE49-F238E27FC236}">
+                <a16:creationId xmlns:a16="http://schemas.microsoft.com/office/drawing/2014/main" id="{F6ABB363-A8B0-F3B5-A24C-31B6499B9FC4}"/>
+              </a:ext>
+            </a:extLst>
+          </p:cNvPr>
+          <p:cNvSpPr>
+            <a:spLocks noGrp="1"/>
+          </p:cNvSpPr>
+          <p:nvPr>
+            <p:ph idx="14"/>
+          </p:nvPr>
+        </p:nvSpPr>
+        <p:spPr/>
+        <p:txBody>
+          <a:bodyPr/>
+          <a:lstStyle/>
+          <a:p>
+            <a:r>
+              <a:rPr lang="en-US" dirty="0"/>
+              <a:t>Done:</a:t>
+            </a:r>
+          </a:p>
+          <a:p>
+            <a:pPr marL="457200" lvl="1" indent="0">
+              <a:buNone/>
+            </a:pPr>
+            <a:r>
+              <a:rPr lang="en-US" dirty="0"/>
+              <a:t>✓ End-to-end VIO on basic MPU ESP32-S3</a:t>
+            </a:r>
+          </a:p>
+          <a:p>
+            <a:pPr marL="457200" lvl="1" indent="0">
+              <a:buNone/>
+            </a:pPr>
+            <a:r>
+              <a:rPr lang="en-US" dirty="0"/>
+              <a:t>✓ IPM + gyro </a:t>
+            </a:r>
+            <a:r>
+              <a:rPr lang="en-US" dirty="0" err="1"/>
+              <a:t>derotation</a:t>
+            </a:r>
+            <a:r>
+              <a:rPr lang="en-US" dirty="0"/>
+              <a:t> + planar EKF</a:t>
+            </a:r>
+          </a:p>
+          <a:p>
+            <a:pPr marL="457200" lvl="1" indent="0">
+              <a:buNone/>
+            </a:pPr>
+            <a:r>
+              <a:rPr lang="en-US" dirty="0"/>
+              <a:t>✓ Drift bounded on closed-loop trajectories where IMU-only diverges</a:t>
+            </a:r>
+          </a:p>
+          <a:p>
+            <a:r>
+              <a:rPr lang="en-US" dirty="0"/>
+              <a:t>Future Steps:</a:t>
+            </a:r>
+          </a:p>
+          <a:p>
+            <a:pPr marL="457200" lvl="1" indent="0">
+              <a:buNone/>
+            </a:pPr>
+            <a:r>
+              <a:rPr lang="en-US" dirty="0" err="1"/>
+              <a:t>TinyML</a:t>
+            </a:r>
+            <a:r>
+              <a:rPr lang="en-US" dirty="0"/>
+              <a:t> motion-class auxiliary channel (Edge Impulse) for adaptive filter tuning</a:t>
+            </a:r>
+          </a:p>
+          <a:p>
+            <a:endParaRPr lang="en-US" dirty="0"/>
+          </a:p>
+        </p:txBody>
+      </p:sp>
+      <p:sp>
+        <p:nvSpPr>
+          <p:cNvPr id="3" name="Title 2">
+            <a:extLst>
+              <a:ext uri="{FF2B5EF4-FFF2-40B4-BE49-F238E27FC236}">
+                <a16:creationId xmlns:a16="http://schemas.microsoft.com/office/drawing/2014/main" id="{5A1044F4-3019-3C3C-880C-BC98AF9E9A08}"/>
+              </a:ext>
+            </a:extLst>
+          </p:cNvPr>
+          <p:cNvSpPr>
+            <a:spLocks noGrp="1"/>
+          </p:cNvSpPr>
+          <p:nvPr>
+            <p:ph type="title"/>
+          </p:nvPr>
+        </p:nvSpPr>
+        <p:spPr/>
+        <p:txBody>
+          <a:bodyPr>
+            <a:normAutofit fontScale="90000"/>
+          </a:bodyPr>
+          <a:lstStyle/>
+          <a:p>
+            <a:r>
+              <a:rPr lang="en-US" dirty="0"/>
+              <a:t>Conclusion and Future Steps</a:t>
+            </a:r>
+          </a:p>
+        </p:txBody>
+      </p:sp>
+      <p:sp>
+        <p:nvSpPr>
+          <p:cNvPr id="4" name="Text Placeholder 3">
+            <a:extLst>
+              <a:ext uri="{FF2B5EF4-FFF2-40B4-BE49-F238E27FC236}">
+                <a16:creationId xmlns:a16="http://schemas.microsoft.com/office/drawing/2014/main" id="{FF3F1CDA-3388-B0FB-9DF2-03E80E28047A}"/>
+              </a:ext>
+            </a:extLst>
+          </p:cNvPr>
+          <p:cNvSpPr>
+            <a:spLocks noGrp="1"/>
+          </p:cNvSpPr>
+          <p:nvPr>
+            <p:ph type="body" sz="quarter" idx="11"/>
+          </p:nvPr>
+        </p:nvSpPr>
+        <p:spPr/>
+        <p:txBody>
+          <a:bodyPr/>
+          <a:lstStyle/>
+          <a:p>
+            <a:endParaRPr lang="en-US"/>
+          </a:p>
+        </p:txBody>
+      </p:sp>
+      <p:sp>
+        <p:nvSpPr>
+          <p:cNvPr id="5" name="Footer Placeholder 4">
+            <a:extLst>
+              <a:ext uri="{FF2B5EF4-FFF2-40B4-BE49-F238E27FC236}">
+                <a16:creationId xmlns:a16="http://schemas.microsoft.com/office/drawing/2014/main" id="{4087B2BF-EC4B-BA59-D41D-0E85969FE5E2}"/>
+              </a:ext>
+            </a:extLst>
+          </p:cNvPr>
+          <p:cNvSpPr>
+            <a:spLocks noGrp="1"/>
+          </p:cNvSpPr>
+          <p:nvPr>
+            <p:ph type="ftr" sz="quarter" idx="15"/>
+          </p:nvPr>
+        </p:nvSpPr>
+        <p:spPr/>
+        <p:txBody>
+          <a:bodyPr/>
+          <a:lstStyle/>
+          <a:p>
+            <a:pPr algn="r"/>
+            <a:r>
+              <a:rPr lang="en-US"/>
+              <a:t>3/31/23            ‹#›</a:t>
+            </a:r>
+            <a:endParaRPr lang="en-US" dirty="0"/>
+          </a:p>
+        </p:txBody>
+      </p:sp>
+    </p:spTree>
+    <p:extLst>
+      <p:ext uri="{BB962C8B-B14F-4D97-AF65-F5344CB8AC3E}">
+        <p14:creationId xmlns:p14="http://schemas.microsoft.com/office/powerpoint/2010/main" val="404975220"/>
+      </p:ext>
+    </p:extLst>
+  </p:cSld>
+  <p:clrMapOvr>
+    <a:masterClrMapping/>
+  </p:clrMapOvr>
+</p:sld>
+</file>
+
+<file path=ppt/slides/slide11.xml><?xml version="1.0" encoding="utf-8"?>
+<p:sld xmlns:a="http://schemas.openxmlformats.org/drawingml/2006/main" xmlns:r="http://schemas.openxmlformats.org/officeDocument/2006/relationships" xmlns:p="http://schemas.openxmlformats.org/presentationml/2006/main">
+  <p:cSld>
+    <p:spTree>
+      <p:nvGrpSpPr>
         <p:cNvPr id="1" name=""/>
         <p:cNvGrpSpPr/>
         <p:nvPr/>
@@ -13937,243 +14144,6 @@
 </file>
 
 <file path=ppt/slides/slide2.xml><?xml version="1.0" encoding="utf-8"?>
-<p:sld xmlns:a="http://schemas.openxmlformats.org/drawingml/2006/main" xmlns:r="http://schemas.openxmlformats.org/officeDocument/2006/relationships" xmlns:p="http://schemas.openxmlformats.org/presentationml/2006/main">
-  <p:cSld>
-    <p:spTree>
-      <p:nvGrpSpPr>
-        <p:cNvPr id="1" name="">
-          <a:extLst>
-            <a:ext uri="{FF2B5EF4-FFF2-40B4-BE49-F238E27FC236}">
-              <a16:creationId xmlns:a16="http://schemas.microsoft.com/office/drawing/2014/main" id="{98E4F09C-7366-BD6B-FEE0-4C7B097977BB}"/>
-            </a:ext>
-          </a:extLst>
-        </p:cNvPr>
-        <p:cNvGrpSpPr/>
-        <p:nvPr/>
-      </p:nvGrpSpPr>
-      <p:grpSpPr>
-        <a:xfrm>
-          <a:off x="0" y="0"/>
-          <a:ext cx="0" cy="0"/>
-          <a:chOff x="0" y="0"/>
-          <a:chExt cx="0" cy="0"/>
-        </a:xfrm>
-      </p:grpSpPr>
-      <p:sp>
-        <p:nvSpPr>
-          <p:cNvPr id="2" name="Text Placeholder 1">
-            <a:extLst>
-              <a:ext uri="{FF2B5EF4-FFF2-40B4-BE49-F238E27FC236}">
-                <a16:creationId xmlns:a16="http://schemas.microsoft.com/office/drawing/2014/main" id="{6F928BF5-4405-70B6-D62C-2A6163D6BCC9}"/>
-              </a:ext>
-            </a:extLst>
-          </p:cNvPr>
-          <p:cNvSpPr>
-            <a:spLocks noGrp="1"/>
-          </p:cNvSpPr>
-          <p:nvPr>
-            <p:ph type="body" sz="quarter" idx="11"/>
-          </p:nvPr>
-        </p:nvSpPr>
-        <p:spPr/>
-        <p:txBody>
-          <a:bodyPr/>
-          <a:lstStyle/>
-          <a:p>
-            <a:endParaRPr lang="en-US" dirty="0"/>
-          </a:p>
-        </p:txBody>
-      </p:sp>
-      <p:sp>
-        <p:nvSpPr>
-          <p:cNvPr id="3" name="Text Placeholder 2">
-            <a:extLst>
-              <a:ext uri="{FF2B5EF4-FFF2-40B4-BE49-F238E27FC236}">
-                <a16:creationId xmlns:a16="http://schemas.microsoft.com/office/drawing/2014/main" id="{5FC2E939-D375-C14A-E644-B53505B50056}"/>
-              </a:ext>
-            </a:extLst>
-          </p:cNvPr>
-          <p:cNvSpPr>
-            <a:spLocks noGrp="1"/>
-          </p:cNvSpPr>
-          <p:nvPr>
-            <p:ph type="body" sz="quarter" idx="10"/>
-          </p:nvPr>
-        </p:nvSpPr>
-        <p:spPr>
-          <a:xfrm>
-            <a:off x="457199" y="1543324"/>
-            <a:ext cx="10849709" cy="4454706"/>
-          </a:xfrm>
-        </p:spPr>
-        <p:txBody>
-          <a:bodyPr/>
-          <a:lstStyle/>
-          <a:p>
-            <a:pPr marL="342900" lvl="0" indent="-228600">
-              <a:spcAft>
-                <a:spcPct val="0"/>
-              </a:spcAft>
-              <a:buFont typeface="Wingdings" pitchFamily="2" charset="2"/>
-              <a:buChar char="§"/>
-              <a:tabLst>
-                <a:tab pos="5024438" algn="dec"/>
-              </a:tabLst>
-            </a:pPr>
-            <a:r>
-              <a:rPr lang="en-US" altLang="en-US" sz="1600" dirty="0"/>
-              <a:t>Indoor, underground, GPS-denied → robots need self contained pose estimation </a:t>
-            </a:r>
-          </a:p>
-          <a:p>
-            <a:pPr marL="342900" lvl="0" indent="-228600">
-              <a:spcAft>
-                <a:spcPct val="0"/>
-              </a:spcAft>
-              <a:buFont typeface="Wingdings" pitchFamily="2" charset="2"/>
-              <a:buChar char="§"/>
-              <a:tabLst>
-                <a:tab pos="5141913" algn="l"/>
-              </a:tabLst>
-            </a:pPr>
-            <a:r>
-              <a:rPr lang="en-US" altLang="en-US" sz="1600" dirty="0"/>
-              <a:t>State-of-the-art VIO (ORB-SLAM3, VINS-Mono) targets ARM Cortex-A / GPU </a:t>
-            </a:r>
-          </a:p>
-          <a:p>
-            <a:pPr marL="342900" lvl="0" indent="-228600">
-              <a:spcAft>
-                <a:spcPct val="0"/>
-              </a:spcAft>
-              <a:buFont typeface="Wingdings" pitchFamily="2" charset="2"/>
-              <a:buChar char="§"/>
-            </a:pPr>
-            <a:r>
-              <a:rPr lang="en-US" altLang="en-US" sz="1600" dirty="0"/>
-              <a:t>We target a ESP32-S3 — two orders of magnitude less compute </a:t>
-            </a:r>
-          </a:p>
-          <a:p>
-            <a:pPr marL="342900" lvl="0" indent="-228600">
-              <a:spcAft>
-                <a:spcPct val="0"/>
-              </a:spcAft>
-              <a:buFont typeface="Wingdings" pitchFamily="2" charset="2"/>
-              <a:buChar char="§"/>
-            </a:pPr>
-            <a:r>
-              <a:rPr lang="en-US" altLang="en-US" sz="1600" dirty="0"/>
-              <a:t>Why care? Inspection swarms, search-and-rescue,  indoor wearables — all deploy at MCU scale</a:t>
-            </a:r>
-          </a:p>
-          <a:p>
-            <a:pPr marL="285750" indent="-285750">
-              <a:buFont typeface="Arial" panose="020B0604020202020204" pitchFamily="34" charset="0"/>
-              <a:buChar char="•"/>
-            </a:pPr>
-            <a:endParaRPr lang="en-US" dirty="0"/>
-          </a:p>
-          <a:p>
-            <a:pPr marL="285750" indent="-285750">
-              <a:buFont typeface="Arial" panose="020B0604020202020204" pitchFamily="34" charset="0"/>
-              <a:buChar char="•"/>
-            </a:pPr>
-            <a:endParaRPr lang="en-US" dirty="0"/>
-          </a:p>
-        </p:txBody>
-      </p:sp>
-      <p:sp>
-        <p:nvSpPr>
-          <p:cNvPr id="4" name="Title 3">
-            <a:extLst>
-              <a:ext uri="{FF2B5EF4-FFF2-40B4-BE49-F238E27FC236}">
-                <a16:creationId xmlns:a16="http://schemas.microsoft.com/office/drawing/2014/main" id="{C32C3DBC-87D7-366A-C74D-439D8713DF29}"/>
-              </a:ext>
-            </a:extLst>
-          </p:cNvPr>
-          <p:cNvSpPr>
-            <a:spLocks noGrp="1"/>
-          </p:cNvSpPr>
-          <p:nvPr>
-            <p:ph type="title"/>
-          </p:nvPr>
-        </p:nvSpPr>
-        <p:spPr/>
-        <p:txBody>
-          <a:bodyPr>
-            <a:normAutofit fontScale="90000"/>
-          </a:bodyPr>
-          <a:lstStyle/>
-          <a:p>
-            <a:r>
-              <a:rPr lang="en-US" dirty="0"/>
-              <a:t>Localization Without GPS, Without a Real Computer</a:t>
-            </a:r>
-          </a:p>
-        </p:txBody>
-      </p:sp>
-      <p:pic>
-        <p:nvPicPr>
-          <p:cNvPr id="1029" name="Picture 5" descr="What Is Simultaneous Localization and Mapping? What Is Simultaneous  Localization and Mapping? | NVIDIA Blog">
-            <a:extLst>
-              <a:ext uri="{FF2B5EF4-FFF2-40B4-BE49-F238E27FC236}">
-                <a16:creationId xmlns:a16="http://schemas.microsoft.com/office/drawing/2014/main" id="{648F58D5-6473-4E90-6256-5BA90C2C7B69}"/>
-              </a:ext>
-            </a:extLst>
-          </p:cNvPr>
-          <p:cNvPicPr>
-            <a:picLocks noChangeAspect="1" noChangeArrowheads="1"/>
-          </p:cNvPicPr>
-          <p:nvPr/>
-        </p:nvPicPr>
-        <p:blipFill>
-          <a:blip r:embed="rId2">
-            <a:extLst>
-              <a:ext uri="{28A0092B-C50C-407E-A947-70E740481C1C}">
-                <a14:useLocalDpi xmlns:a14="http://schemas.microsoft.com/office/drawing/2010/main" val="0"/>
-              </a:ext>
-            </a:extLst>
-          </a:blip>
-          <a:srcRect/>
-          <a:stretch>
-            <a:fillRect/>
-          </a:stretch>
-        </p:blipFill>
-        <p:spPr bwMode="auto">
-          <a:xfrm>
-            <a:off x="6637867" y="1973874"/>
-            <a:ext cx="5238044" cy="2910252"/>
-          </a:xfrm>
-          <a:prstGeom prst="rect">
-            <a:avLst/>
-          </a:prstGeom>
-          <a:noFill/>
-          <a:extLst>
-            <a:ext uri="{909E8E84-426E-40DD-AFC4-6F175D3DCCD1}">
-              <a14:hiddenFill xmlns:a14="http://schemas.microsoft.com/office/drawing/2010/main">
-                <a:solidFill>
-                  <a:srgbClr val="FFFFFF"/>
-                </a:solidFill>
-              </a14:hiddenFill>
-            </a:ext>
-          </a:extLst>
-        </p:spPr>
-      </p:pic>
-    </p:spTree>
-    <p:extLst>
-      <p:ext uri="{BB962C8B-B14F-4D97-AF65-F5344CB8AC3E}">
-        <p14:creationId xmlns:p14="http://schemas.microsoft.com/office/powerpoint/2010/main" val="2126481537"/>
-      </p:ext>
-    </p:extLst>
-  </p:cSld>
-  <p:clrMapOvr>
-    <a:masterClrMapping/>
-  </p:clrMapOvr>
-</p:sld>
-</file>
-
-<file path=ppt/slides/slide3.xml><?xml version="1.0" encoding="utf-8"?>
 <p:sld xmlns:a="http://schemas.openxmlformats.org/drawingml/2006/main" xmlns:r="http://schemas.openxmlformats.org/officeDocument/2006/relationships" xmlns:p="http://schemas.openxmlformats.org/presentationml/2006/main">
   <p:cSld>
     <p:spTree>
@@ -14217,6 +14187,249 @@
           <a:bodyPr/>
           <a:lstStyle/>
           <a:p>
+            <a:pPr marL="342900" lvl="0">
+              <a:spcAft>
+                <a:spcPct val="0"/>
+              </a:spcAft>
+              <a:tabLst>
+                <a:tab pos="5024438" algn="dec"/>
+              </a:tabLst>
+            </a:pPr>
+            <a:r>
+              <a:rPr lang="en-US" altLang="en-US" sz="1600" dirty="0"/>
+              <a:t>Indoor, underground, GPS-denied → robots need self contained pose estimation </a:t>
+            </a:r>
+          </a:p>
+          <a:p>
+            <a:pPr marL="342900" lvl="0">
+              <a:spcAft>
+                <a:spcPct val="0"/>
+              </a:spcAft>
+              <a:tabLst>
+                <a:tab pos="5141913" algn="l"/>
+              </a:tabLst>
+            </a:pPr>
+            <a:r>
+              <a:rPr lang="en-US" altLang="en-US" sz="1600" dirty="0"/>
+              <a:t>State-of-the-art VIO (ORB-SLAM3, VINS-Mono) targets ARM Cortex-A / GPU </a:t>
+            </a:r>
+          </a:p>
+          <a:p>
+            <a:pPr marL="342900" lvl="0">
+              <a:spcAft>
+                <a:spcPct val="0"/>
+              </a:spcAft>
+            </a:pPr>
+            <a:r>
+              <a:rPr lang="en-US" altLang="en-US" sz="1600" dirty="0"/>
+              <a:t>We target a ESP32-S3 — two orders of magnitude less compute </a:t>
+            </a:r>
+          </a:p>
+          <a:p>
+            <a:pPr marL="342900" lvl="0">
+              <a:spcAft>
+                <a:spcPct val="0"/>
+              </a:spcAft>
+            </a:pPr>
+            <a:r>
+              <a:rPr lang="en-US" altLang="en-US" sz="1600" dirty="0"/>
+              <a:t>Why care? Inspection swarms, search-and-rescue,  indoor wearables — all deploy at MCU scale</a:t>
+            </a:r>
+          </a:p>
+          <a:p>
+            <a:endParaRPr lang="en-US" dirty="0"/>
+          </a:p>
+        </p:txBody>
+      </p:sp>
+      <p:sp>
+        <p:nvSpPr>
+          <p:cNvPr id="3" name="Title 2">
+            <a:extLst>
+              <a:ext uri="{FF2B5EF4-FFF2-40B4-BE49-F238E27FC236}">
+                <a16:creationId xmlns:a16="http://schemas.microsoft.com/office/drawing/2014/main" id="{4536E87E-E9D9-6932-F09A-9B42F6BB29BC}"/>
+              </a:ext>
+            </a:extLst>
+          </p:cNvPr>
+          <p:cNvSpPr>
+            <a:spLocks noGrp="1"/>
+          </p:cNvSpPr>
+          <p:nvPr>
+            <p:ph type="title"/>
+          </p:nvPr>
+        </p:nvSpPr>
+        <p:spPr/>
+        <p:txBody>
+          <a:bodyPr>
+            <a:normAutofit fontScale="90000"/>
+          </a:bodyPr>
+          <a:lstStyle/>
+          <a:p>
+            <a:r>
+              <a:rPr lang="en-US" dirty="0"/>
+              <a:t>Localization Without GPS, Without a Real Computer</a:t>
+            </a:r>
+          </a:p>
+        </p:txBody>
+      </p:sp>
+      <p:sp>
+        <p:nvSpPr>
+          <p:cNvPr id="4" name="Text Placeholder 3">
+            <a:extLst>
+              <a:ext uri="{FF2B5EF4-FFF2-40B4-BE49-F238E27FC236}">
+                <a16:creationId xmlns:a16="http://schemas.microsoft.com/office/drawing/2014/main" id="{07DE2506-ABBD-18DB-C243-7E91228AEC17}"/>
+              </a:ext>
+            </a:extLst>
+          </p:cNvPr>
+          <p:cNvSpPr>
+            <a:spLocks noGrp="1"/>
+          </p:cNvSpPr>
+          <p:nvPr>
+            <p:ph type="body" sz="quarter" idx="11"/>
+          </p:nvPr>
+        </p:nvSpPr>
+        <p:spPr/>
+        <p:txBody>
+          <a:bodyPr/>
+          <a:lstStyle/>
+          <a:p>
+            <a:endParaRPr lang="en-US"/>
+          </a:p>
+        </p:txBody>
+      </p:sp>
+      <p:sp>
+        <p:nvSpPr>
+          <p:cNvPr id="5" name="Footer Placeholder 4">
+            <a:extLst>
+              <a:ext uri="{FF2B5EF4-FFF2-40B4-BE49-F238E27FC236}">
+                <a16:creationId xmlns:a16="http://schemas.microsoft.com/office/drawing/2014/main" id="{45BAF507-D865-1544-CD27-8E32C0289516}"/>
+              </a:ext>
+            </a:extLst>
+          </p:cNvPr>
+          <p:cNvSpPr>
+            <a:spLocks noGrp="1"/>
+          </p:cNvSpPr>
+          <p:nvPr>
+            <p:ph type="ftr" sz="quarter" idx="15"/>
+          </p:nvPr>
+        </p:nvSpPr>
+        <p:spPr/>
+        <p:txBody>
+          <a:bodyPr/>
+          <a:lstStyle/>
+          <a:p>
+            <a:pPr algn="r"/>
+            <a:r>
+              <a:rPr lang="en-US"/>
+              <a:t>3/31/23            ‹#›</a:t>
+            </a:r>
+            <a:endParaRPr lang="en-US" dirty="0"/>
+          </a:p>
+        </p:txBody>
+      </p:sp>
+      <p:pic>
+        <p:nvPicPr>
+          <p:cNvPr id="6" name="Picture 5" descr="What Is Simultaneous Localization and Mapping? What Is Simultaneous  Localization and Mapping? | NVIDIA Blog">
+            <a:extLst>
+              <a:ext uri="{FF2B5EF4-FFF2-40B4-BE49-F238E27FC236}">
+                <a16:creationId xmlns:a16="http://schemas.microsoft.com/office/drawing/2014/main" id="{039B7B44-2062-127C-B30D-DFC3ADA4B7D6}"/>
+              </a:ext>
+            </a:extLst>
+          </p:cNvPr>
+          <p:cNvPicPr>
+            <a:picLocks noChangeAspect="1" noChangeArrowheads="1"/>
+          </p:cNvPicPr>
+          <p:nvPr/>
+        </p:nvPicPr>
+        <p:blipFill>
+          <a:blip r:embed="rId2">
+            <a:extLst>
+              <a:ext uri="{28A0092B-C50C-407E-A947-70E740481C1C}">
+                <a14:useLocalDpi xmlns:a14="http://schemas.microsoft.com/office/drawing/2010/main" val="0"/>
+              </a:ext>
+            </a:extLst>
+          </a:blip>
+          <a:srcRect/>
+          <a:stretch>
+            <a:fillRect/>
+          </a:stretch>
+        </p:blipFill>
+        <p:spPr bwMode="auto">
+          <a:xfrm>
+            <a:off x="6496754" y="3087778"/>
+            <a:ext cx="5238044" cy="2910252"/>
+          </a:xfrm>
+          <a:prstGeom prst="rect">
+            <a:avLst/>
+          </a:prstGeom>
+          <a:noFill/>
+          <a:extLst>
+            <a:ext uri="{909E8E84-426E-40DD-AFC4-6F175D3DCCD1}">
+              <a14:hiddenFill xmlns:a14="http://schemas.microsoft.com/office/drawing/2010/main">
+                <a:solidFill>
+                  <a:srgbClr val="FFFFFF"/>
+                </a:solidFill>
+              </a14:hiddenFill>
+            </a:ext>
+          </a:extLst>
+        </p:spPr>
+      </p:pic>
+    </p:spTree>
+    <p:extLst>
+      <p:ext uri="{BB962C8B-B14F-4D97-AF65-F5344CB8AC3E}">
+        <p14:creationId xmlns:p14="http://schemas.microsoft.com/office/powerpoint/2010/main" val="3669763031"/>
+      </p:ext>
+    </p:extLst>
+  </p:cSld>
+  <p:clrMapOvr>
+    <a:masterClrMapping/>
+  </p:clrMapOvr>
+</p:sld>
+</file>
+
+<file path=ppt/slides/slide3.xml><?xml version="1.0" encoding="utf-8"?>
+<p:sld xmlns:a="http://schemas.openxmlformats.org/drawingml/2006/main" xmlns:r="http://schemas.openxmlformats.org/officeDocument/2006/relationships" xmlns:p="http://schemas.openxmlformats.org/presentationml/2006/main">
+  <p:cSld>
+    <p:spTree>
+      <p:nvGrpSpPr>
+        <p:cNvPr id="1" name="">
+          <a:extLst>
+            <a:ext uri="{FF2B5EF4-FFF2-40B4-BE49-F238E27FC236}">
+              <a16:creationId xmlns:a16="http://schemas.microsoft.com/office/drawing/2014/main" id="{238A0153-E4AD-2599-1FD1-FF09E27C15AB}"/>
+            </a:ext>
+          </a:extLst>
+        </p:cNvPr>
+        <p:cNvGrpSpPr/>
+        <p:nvPr/>
+      </p:nvGrpSpPr>
+      <p:grpSpPr>
+        <a:xfrm>
+          <a:off x="0" y="0"/>
+          <a:ext cx="0" cy="0"/>
+          <a:chOff x="0" y="0"/>
+          <a:chExt cx="0" cy="0"/>
+        </a:xfrm>
+      </p:grpSpPr>
+      <p:sp>
+        <p:nvSpPr>
+          <p:cNvPr id="2" name="Content Placeholder 1">
+            <a:extLst>
+              <a:ext uri="{FF2B5EF4-FFF2-40B4-BE49-F238E27FC236}">
+                <a16:creationId xmlns:a16="http://schemas.microsoft.com/office/drawing/2014/main" id="{ED6289B5-9B28-EE79-61D2-2D60D374A7A3}"/>
+              </a:ext>
+            </a:extLst>
+          </p:cNvPr>
+          <p:cNvSpPr>
+            <a:spLocks noGrp="1"/>
+          </p:cNvSpPr>
+          <p:nvPr>
+            <p:ph idx="14"/>
+          </p:nvPr>
+        </p:nvSpPr>
+        <p:spPr/>
+        <p:txBody>
+          <a:bodyPr/>
+          <a:lstStyle/>
+          <a:p>
             <a:pPr marL="57150" lvl="0" fontAlgn="base">
               <a:spcAft>
                 <a:spcPct val="0"/>
@@ -14246,17 +14459,6 @@
             </a:pPr>
             <a:r>
               <a:rPr lang="en-US" altLang="en-US" sz="1600" dirty="0"/>
-              <a:t>Drift wall: MEMS gyro bias is the silent killer — drift is quadratic in time </a:t>
-            </a:r>
-          </a:p>
-          <a:p>
-            <a:pPr marL="57150" lvl="0" fontAlgn="base">
-              <a:spcAft>
-                <a:spcPct val="0"/>
-              </a:spcAft>
-            </a:pPr>
-            <a:r>
-              <a:rPr lang="en-US" altLang="en-US" sz="1600" dirty="0"/>
               <a:t>Pure IMU dead-reckoning fails after a few seconds; pure vision fails on scale</a:t>
             </a:r>
           </a:p>
@@ -14270,7 +14472,7 @@
           <p:cNvPr id="3" name="Title 2">
             <a:extLst>
               <a:ext uri="{FF2B5EF4-FFF2-40B4-BE49-F238E27FC236}">
-                <a16:creationId xmlns:a16="http://schemas.microsoft.com/office/drawing/2014/main" id="{4536E87E-E9D9-6932-F09A-9B42F6BB29BC}"/>
+                <a16:creationId xmlns:a16="http://schemas.microsoft.com/office/drawing/2014/main" id="{93031018-0A50-5C49-031F-DF9E8B802061}"/>
               </a:ext>
             </a:extLst>
           </p:cNvPr>
@@ -14300,7 +14502,7 @@
           <p:cNvPr id="4" name="Text Placeholder 3">
             <a:extLst>
               <a:ext uri="{FF2B5EF4-FFF2-40B4-BE49-F238E27FC236}">
-                <a16:creationId xmlns:a16="http://schemas.microsoft.com/office/drawing/2014/main" id="{07DE2506-ABBD-18DB-C243-7E91228AEC17}"/>
+                <a16:creationId xmlns:a16="http://schemas.microsoft.com/office/drawing/2014/main" id="{93AA09F2-9508-E95F-90A6-ADB55B387278}"/>
               </a:ext>
             </a:extLst>
           </p:cNvPr>
@@ -14325,7 +14527,7 @@
           <p:cNvPr id="5" name="Footer Placeholder 4">
             <a:extLst>
               <a:ext uri="{FF2B5EF4-FFF2-40B4-BE49-F238E27FC236}">
-                <a16:creationId xmlns:a16="http://schemas.microsoft.com/office/drawing/2014/main" id="{45BAF507-D865-1544-CD27-8E32C0289516}"/>
+                <a16:creationId xmlns:a16="http://schemas.microsoft.com/office/drawing/2014/main" id="{60EED929-5E45-FA85-8E22-26B6F955080C}"/>
               </a:ext>
             </a:extLst>
           </p:cNvPr>
@@ -14353,7 +14555,7 @@
     </p:spTree>
     <p:extLst>
       <p:ext uri="{BB962C8B-B14F-4D97-AF65-F5344CB8AC3E}">
-        <p14:creationId xmlns:p14="http://schemas.microsoft.com/office/powerpoint/2010/main" val="3669763031"/>
+        <p14:creationId xmlns:p14="http://schemas.microsoft.com/office/powerpoint/2010/main" val="3012277180"/>
       </p:ext>
     </p:extLst>
   </p:cSld>
@@ -14385,7 +14587,7 @@
           <p:cNvPr id="2" name="Text Placeholder 1">
             <a:extLst>
               <a:ext uri="{FF2B5EF4-FFF2-40B4-BE49-F238E27FC236}">
-                <a16:creationId xmlns:a16="http://schemas.microsoft.com/office/drawing/2014/main" id="{50836D38-B30B-79E6-4614-A4007BE0B628}"/>
+                <a16:creationId xmlns:a16="http://schemas.microsoft.com/office/drawing/2014/main" id="{9CA295D0-B453-B351-7718-B5E7A6B6694C}"/>
               </a:ext>
             </a:extLst>
           </p:cNvPr>
@@ -14410,7 +14612,7 @@
           <p:cNvPr id="4" name="Title 3">
             <a:extLst>
               <a:ext uri="{FF2B5EF4-FFF2-40B4-BE49-F238E27FC236}">
-                <a16:creationId xmlns:a16="http://schemas.microsoft.com/office/drawing/2014/main" id="{60E15891-862B-71ED-4E56-B86B4EB7C720}"/>
+                <a16:creationId xmlns:a16="http://schemas.microsoft.com/office/drawing/2014/main" id="{9501610F-3E9A-F683-5FEF-A41E60CCCF59}"/>
               </a:ext>
             </a:extLst>
           </p:cNvPr>
@@ -14429,148 +14631,47 @@
           <a:lstStyle/>
           <a:p>
             <a:r>
-              <a:rPr lang="en-US" dirty="0"/>
-              <a:t>Hardware Constrains</a:t>
-            </a:r>
-          </a:p>
-        </p:txBody>
-      </p:sp>
-      <p:sp>
-        <p:nvSpPr>
-          <p:cNvPr id="6" name="Rectangle 1">
-            <a:extLst>
-              <a:ext uri="{FF2B5EF4-FFF2-40B4-BE49-F238E27FC236}">
-                <a16:creationId xmlns:a16="http://schemas.microsoft.com/office/drawing/2014/main" id="{81722A86-09FA-4707-6154-0FEC2E2007F9}"/>
-              </a:ext>
-            </a:extLst>
-          </p:cNvPr>
-          <p:cNvSpPr>
-            <a:spLocks noGrp="1" noChangeArrowheads="1"/>
-          </p:cNvSpPr>
-          <p:nvPr>
-            <p:ph type="body" sz="quarter" idx="10"/>
-          </p:nvPr>
-        </p:nvSpPr>
-        <p:spPr bwMode="auto">
-          <a:xfrm>
-            <a:off x="457199" y="3088952"/>
-            <a:ext cx="6873805" cy="1363450"/>
+              <a:rPr lang="en-US" i="0" dirty="0"/>
+              <a:t>System Architecture</a:t>
+            </a:r>
+            <a:endParaRPr lang="en-US" dirty="0"/>
+          </a:p>
+        </p:txBody>
+      </p:sp>
+      <p:pic>
+        <p:nvPicPr>
+          <p:cNvPr id="8" name="Picture 7" descr="A diagram of a computer system&#10;&#10;AI-generated content may be incorrect.">
+            <a:extLst>
+              <a:ext uri="{FF2B5EF4-FFF2-40B4-BE49-F238E27FC236}">
+                <a16:creationId xmlns:a16="http://schemas.microsoft.com/office/drawing/2014/main" id="{4CAA2B4A-971A-5154-80AC-DDCF7FA3220D}"/>
+              </a:ext>
+            </a:extLst>
+          </p:cNvPr>
+          <p:cNvPicPr>
+            <a:picLocks noChangeAspect="1"/>
+          </p:cNvPicPr>
+          <p:nvPr/>
+        </p:nvPicPr>
+        <p:blipFill>
+          <a:blip r:embed="rId2"/>
+          <a:stretch>
+            <a:fillRect/>
+          </a:stretch>
+        </p:blipFill>
+        <p:spPr>
+          <a:xfrm>
+            <a:off x="1598636" y="1441334"/>
+            <a:ext cx="8983838" cy="4658685"/>
           </a:xfrm>
           <a:prstGeom prst="rect">
             <a:avLst/>
           </a:prstGeom>
-          <a:noFill/>
-          <a:ln>
-            <a:noFill/>
-          </a:ln>
-          <a:effectLst/>
-          <a:extLst>
-            <a:ext uri="{909E8E84-426E-40DD-AFC4-6F175D3DCCD1}">
-              <a14:hiddenFill xmlns:a14="http://schemas.microsoft.com/office/drawing/2010/main">
-                <a:solidFill>
-                  <a:schemeClr val="accent1"/>
-                </a:solidFill>
-              </a14:hiddenFill>
-            </a:ext>
-            <a:ext uri="{91240B29-F687-4F45-9708-019B960494DF}">
-              <a14:hiddenLine xmlns:a14="http://schemas.microsoft.com/office/drawing/2010/main" w="9525">
-                <a:solidFill>
-                  <a:schemeClr val="tx1"/>
-                </a:solidFill>
-                <a:miter lim="800000"/>
-                <a:headEnd/>
-                <a:tailEnd/>
-              </a14:hiddenLine>
-            </a:ext>
-            <a:ext uri="{AF507438-7753-43E0-B8FC-AC1667EBCBE1}">
-              <a14:hiddenEffects xmlns:a14="http://schemas.microsoft.com/office/drawing/2010/main">
-                <a:effectLst>
-                  <a:outerShdw dist="35921" dir="2700000" algn="ctr" rotWithShape="0">
-                    <a:schemeClr val="bg2"/>
-                  </a:outerShdw>
-                </a:effectLst>
-              </a14:hiddenEffects>
-            </a:ext>
-          </a:extLst>
-        </p:spPr>
-        <p:txBody>
-          <a:bodyPr vert="horz" wrap="none" lIns="91440" tIns="45720" rIns="91440" bIns="45720" numCol="1" anchor="ctr" anchorCtr="0" compatLnSpc="1">
-            <a:prstTxWarp prst="textNoShape">
-              <a:avLst/>
-            </a:prstTxWarp>
-            <a:spAutoFit/>
-          </a:bodyPr>
-          <a:lstStyle/>
-          <a:p>
-            <a:pPr marL="57150" marR="0" lvl="0" indent="-228600" fontAlgn="base">
-              <a:spcAft>
-                <a:spcPct val="0"/>
-              </a:spcAft>
-              <a:buClrTx/>
-              <a:buSzTx/>
-              <a:buFont typeface="Wingdings" pitchFamily="2" charset="2"/>
-              <a:buChar char="§"/>
-              <a:tabLst/>
-            </a:pPr>
-            <a:r>
-              <a:rPr lang="en-US" altLang="en-US" sz="1600" dirty="0"/>
-              <a:t>Scale ambiguity: monocular vision can't recover metric scale alone </a:t>
-            </a:r>
-          </a:p>
-          <a:p>
-            <a:pPr marL="57150" marR="0" lvl="0" indent="-228600" fontAlgn="base">
-              <a:spcAft>
-                <a:spcPct val="0"/>
-              </a:spcAft>
-              <a:buClrTx/>
-              <a:buSzTx/>
-              <a:buFont typeface="Wingdings" pitchFamily="2" charset="2"/>
-              <a:buChar char="§"/>
-              <a:tabLst/>
-            </a:pPr>
-            <a:r>
-              <a:rPr lang="en-US" altLang="en-US" sz="1600" dirty="0"/>
-              <a:t>Compute wall: SVD, Essential matrices, RANSAC don't fit a 240 MHz dual core </a:t>
-            </a:r>
-          </a:p>
-          <a:p>
-            <a:pPr marL="57150" marR="0" lvl="0" indent="-228600" fontAlgn="base">
-              <a:spcAft>
-                <a:spcPct val="0"/>
-              </a:spcAft>
-              <a:buClrTx/>
-              <a:buSzTx/>
-              <a:buFont typeface="Wingdings" pitchFamily="2" charset="2"/>
-              <a:buChar char="§"/>
-              <a:tabLst/>
-            </a:pPr>
-            <a:r>
-              <a:rPr lang="en-US" altLang="en-US" sz="1600" dirty="0"/>
-              <a:t>Drift wall: MEMS gyro bias is the silent killer — drift is quadratic in time </a:t>
-            </a:r>
-          </a:p>
-          <a:p>
-            <a:pPr marL="57150" marR="0" lvl="0" indent="-228600" fontAlgn="base">
-              <a:spcAft>
-                <a:spcPct val="0"/>
-              </a:spcAft>
-              <a:buClrTx/>
-              <a:buSzTx/>
-              <a:buFont typeface="Wingdings" pitchFamily="2" charset="2"/>
-              <a:buChar char="§"/>
-              <a:tabLst/>
-            </a:pPr>
-            <a:r>
-              <a:rPr lang="en-US" altLang="en-US" sz="1600" dirty="0"/>
-              <a:t>Pure IMU dead-reckoning fails after a few seconds; pure vision fails on scale</a:t>
-            </a:r>
-          </a:p>
-        </p:txBody>
-      </p:sp>
+        </p:spPr>
+      </p:pic>
     </p:spTree>
     <p:extLst>
       <p:ext uri="{BB962C8B-B14F-4D97-AF65-F5344CB8AC3E}">
-        <p14:creationId xmlns:p14="http://schemas.microsoft.com/office/powerpoint/2010/main" val="514789102"/>
+        <p14:creationId xmlns:p14="http://schemas.microsoft.com/office/powerpoint/2010/main" val="2469829648"/>
       </p:ext>
     </p:extLst>
   </p:cSld>
@@ -14602,7 +14703,7 @@
           <p:cNvPr id="2" name="Text Placeholder 1">
             <a:extLst>
               <a:ext uri="{FF2B5EF4-FFF2-40B4-BE49-F238E27FC236}">
-                <a16:creationId xmlns:a16="http://schemas.microsoft.com/office/drawing/2014/main" id="{9CA295D0-B453-B351-7718-B5E7A6B6694C}"/>
+                <a16:creationId xmlns:a16="http://schemas.microsoft.com/office/drawing/2014/main" id="{0A131BF6-20F4-5685-331E-23BEB2CB4542}"/>
               </a:ext>
             </a:extLst>
           </p:cNvPr>
@@ -14624,39 +14725,10 @@
       </p:sp>
       <p:sp>
         <p:nvSpPr>
-          <p:cNvPr id="3" name="Text Placeholder 2">
-            <a:extLst>
-              <a:ext uri="{FF2B5EF4-FFF2-40B4-BE49-F238E27FC236}">
-                <a16:creationId xmlns:a16="http://schemas.microsoft.com/office/drawing/2014/main" id="{5994D968-BC79-68BF-BCD0-226BDEE255EA}"/>
-              </a:ext>
-            </a:extLst>
-          </p:cNvPr>
-          <p:cNvSpPr>
-            <a:spLocks noGrp="1"/>
-          </p:cNvSpPr>
-          <p:nvPr>
-            <p:ph type="body" sz="quarter" idx="10"/>
-          </p:nvPr>
-        </p:nvSpPr>
-        <p:spPr/>
-        <p:txBody>
-          <a:bodyPr/>
-          <a:lstStyle/>
-          <a:p>
-            <a:pPr marL="285750" indent="-285750">
-              <a:buFont typeface="Arial" panose="020B0604020202020204" pitchFamily="34" charset="0"/>
-              <a:buChar char="•"/>
-            </a:pPr>
-            <a:endParaRPr lang="en-US" dirty="0"/>
-          </a:p>
-        </p:txBody>
-      </p:sp>
-      <p:sp>
-        <p:nvSpPr>
           <p:cNvPr id="4" name="Title 3">
             <a:extLst>
               <a:ext uri="{FF2B5EF4-FFF2-40B4-BE49-F238E27FC236}">
-                <a16:creationId xmlns:a16="http://schemas.microsoft.com/office/drawing/2014/main" id="{9501610F-3E9A-F683-5FEF-A41E60CCCF59}"/>
+                <a16:creationId xmlns:a16="http://schemas.microsoft.com/office/drawing/2014/main" id="{249950BB-E57C-9031-1BFC-27EBE61FDBCA}"/>
               </a:ext>
             </a:extLst>
           </p:cNvPr>
@@ -14675,8 +14747,37 @@
           <a:lstStyle/>
           <a:p>
             <a:r>
-              <a:rPr lang="en-US" i="0" dirty="0"/>
-              <a:t>System Architecture</a:t>
+              <a:rPr lang="en-US" dirty="0"/>
+              <a:t>Optical Flow and Lucas-Kanade tracking</a:t>
+            </a:r>
+          </a:p>
+        </p:txBody>
+      </p:sp>
+      <p:sp>
+        <p:nvSpPr>
+          <p:cNvPr id="5" name="Footer Placeholder 4">
+            <a:extLst>
+              <a:ext uri="{FF2B5EF4-FFF2-40B4-BE49-F238E27FC236}">
+                <a16:creationId xmlns:a16="http://schemas.microsoft.com/office/drawing/2014/main" id="{0DA58C3B-1E7B-210E-3812-0D48F3A8D166}"/>
+              </a:ext>
+            </a:extLst>
+          </p:cNvPr>
+          <p:cNvSpPr>
+            <a:spLocks noGrp="1"/>
+          </p:cNvSpPr>
+          <p:nvPr>
+            <p:ph type="ftr" sz="quarter" idx="12"/>
+          </p:nvPr>
+        </p:nvSpPr>
+        <p:spPr/>
+        <p:txBody>
+          <a:bodyPr/>
+          <a:lstStyle/>
+          <a:p>
+            <a:pPr algn="r"/>
+            <a:r>
+              <a:rPr lang="en-US"/>
+              <a:t>3/31/23            ‹#›</a:t>
             </a:r>
             <a:endParaRPr lang="en-US" dirty="0"/>
           </a:p>
@@ -14684,10 +14785,428 @@
       </p:sp>
       <p:pic>
         <p:nvPicPr>
-          <p:cNvPr id="8" name="Picture 7" descr="A diagram of a computer system&#10;&#10;AI-generated content may be incorrect.">
-            <a:extLst>
-              <a:ext uri="{FF2B5EF4-FFF2-40B4-BE49-F238E27FC236}">
-                <a16:creationId xmlns:a16="http://schemas.microsoft.com/office/drawing/2014/main" id="{4CAA2B4A-971A-5154-80AC-DDCF7FA3220D}"/>
+          <p:cNvPr id="6" name="Google Shape;16;g3e7c154889a_0_8">
+            <a:extLst>
+              <a:ext uri="{FF2B5EF4-FFF2-40B4-BE49-F238E27FC236}">
+                <a16:creationId xmlns:a16="http://schemas.microsoft.com/office/drawing/2014/main" id="{43B86BA6-A6F0-2BF5-0BB5-BAA38DF6E119}"/>
+              </a:ext>
+            </a:extLst>
+          </p:cNvPr>
+          <p:cNvPicPr preferRelativeResize="0"/>
+          <p:nvPr/>
+        </p:nvPicPr>
+        <p:blipFill>
+          <a:blip r:embed="rId2">
+            <a:alphaModFix/>
+          </a:blip>
+          <a:stretch>
+            <a:fillRect/>
+          </a:stretch>
+        </p:blipFill>
+        <p:spPr>
+          <a:xfrm>
+            <a:off x="8237168" y="1581354"/>
+            <a:ext cx="3422125" cy="2566600"/>
+          </a:xfrm>
+          <a:prstGeom prst="rect">
+            <a:avLst/>
+          </a:prstGeom>
+          <a:noFill/>
+          <a:ln>
+            <a:noFill/>
+          </a:ln>
+        </p:spPr>
+      </p:pic>
+      <p:sp>
+        <p:nvSpPr>
+          <p:cNvPr id="8" name="Google Shape;18;g3e7c154889a_0_8">
+            <a:extLst>
+              <a:ext uri="{FF2B5EF4-FFF2-40B4-BE49-F238E27FC236}">
+                <a16:creationId xmlns:a16="http://schemas.microsoft.com/office/drawing/2014/main" id="{8665BBDB-CAE5-9B52-176E-68175B860AFB}"/>
+              </a:ext>
+            </a:extLst>
+          </p:cNvPr>
+          <p:cNvSpPr txBox="1"/>
+          <p:nvPr/>
+        </p:nvSpPr>
+        <p:spPr>
+          <a:xfrm>
+            <a:off x="8448230" y="4266963"/>
+            <a:ext cx="3000000" cy="369300"/>
+          </a:xfrm>
+          <a:prstGeom prst="rect">
+            <a:avLst/>
+          </a:prstGeom>
+          <a:noFill/>
+          <a:ln>
+            <a:noFill/>
+          </a:ln>
+        </p:spPr>
+        <p:txBody>
+          <a:bodyPr spcFirstLastPara="1" wrap="square" lIns="91425" tIns="91425" rIns="91425" bIns="91425" anchor="t" anchorCtr="0">
+            <a:spAutoFit/>
+          </a:bodyPr>
+          <a:lstStyle/>
+          <a:p>
+            <a:pPr marL="0" lvl="0" indent="0" algn="ctr" rtl="0">
+              <a:spcBef>
+                <a:spcPts val="0"/>
+              </a:spcBef>
+              <a:spcAft>
+                <a:spcPts val="0"/>
+              </a:spcAft>
+              <a:buNone/>
+            </a:pPr>
+            <a:r>
+              <a:rPr lang="en-US" sz="1200">
+                <a:solidFill>
+                  <a:schemeClr val="dk1"/>
+                </a:solidFill>
+              </a:rPr>
+              <a:t>Example of optical flow</a:t>
+            </a:r>
+            <a:r>
+              <a:rPr lang="en-US" sz="1200">
+                <a:solidFill>
+                  <a:schemeClr val="dk1"/>
+                </a:solidFill>
+                <a:latin typeface="Times New Roman"/>
+                <a:ea typeface="Times New Roman"/>
+                <a:cs typeface="Times New Roman"/>
+                <a:sym typeface="Times New Roman"/>
+              </a:rPr>
+              <a:t> </a:t>
+            </a:r>
+            <a:r>
+              <a:rPr lang="en-US" sz="1100">
+                <a:solidFill>
+                  <a:schemeClr val="dk1"/>
+                </a:solidFill>
+              </a:rPr>
+              <a:t> </a:t>
+            </a:r>
+            <a:endParaRPr/>
+          </a:p>
+        </p:txBody>
+      </p:sp>
+      <p:sp>
+        <p:nvSpPr>
+          <p:cNvPr id="9" name="Google Shape;20;g3e7c154889a_0_8">
+            <a:extLst>
+              <a:ext uri="{FF2B5EF4-FFF2-40B4-BE49-F238E27FC236}">
+                <a16:creationId xmlns:a16="http://schemas.microsoft.com/office/drawing/2014/main" id="{D719BC5E-50B8-67FF-5AE2-A57BCDC5FE93}"/>
+              </a:ext>
+            </a:extLst>
+          </p:cNvPr>
+          <p:cNvSpPr txBox="1"/>
+          <p:nvPr/>
+        </p:nvSpPr>
+        <p:spPr>
+          <a:xfrm>
+            <a:off x="521443" y="1792973"/>
+            <a:ext cx="6831019" cy="1735800"/>
+          </a:xfrm>
+          <a:prstGeom prst="rect">
+            <a:avLst/>
+          </a:prstGeom>
+          <a:noFill/>
+          <a:ln>
+            <a:noFill/>
+          </a:ln>
+        </p:spPr>
+        <p:txBody>
+          <a:bodyPr spcFirstLastPara="1" wrap="square" lIns="91425" tIns="91425" rIns="91425" bIns="91425" anchor="t" anchorCtr="0">
+            <a:noAutofit/>
+          </a:bodyPr>
+          <a:lstStyle/>
+          <a:p>
+            <a:pPr marL="0" lvl="0" indent="0" algn="l" rtl="0">
+              <a:spcBef>
+                <a:spcPts val="0"/>
+              </a:spcBef>
+              <a:spcAft>
+                <a:spcPts val="0"/>
+              </a:spcAft>
+              <a:buNone/>
+            </a:pPr>
+            <a:r>
+              <a:rPr lang="en-US" sz="1600" u="sng" dirty="0">
+                <a:latin typeface="Acumin Pro" panose="020B0504020202020204" pitchFamily="34" charset="77"/>
+              </a:rPr>
+              <a:t>Fast 9 corner detection:</a:t>
+            </a:r>
+            <a:endParaRPr sz="1600" u="sng" dirty="0">
+              <a:latin typeface="Acumin Pro" panose="020B0504020202020204" pitchFamily="34" charset="77"/>
+            </a:endParaRPr>
+          </a:p>
+          <a:p>
+            <a:pPr marL="0" lvl="0" indent="0" algn="l" rtl="0">
+              <a:spcBef>
+                <a:spcPts val="0"/>
+              </a:spcBef>
+              <a:spcAft>
+                <a:spcPts val="0"/>
+              </a:spcAft>
+              <a:buNone/>
+            </a:pPr>
+            <a:r>
+              <a:rPr lang="en-US" sz="1600" dirty="0">
+                <a:latin typeface="Acumin Pro" panose="020B0504020202020204" pitchFamily="34" charset="77"/>
+              </a:rPr>
+              <a:t>Finds good points to track by looking for sharp corners in each grayscale frame. It checks the pixels around each point, keeps the ones with strong brightness changes, quickly rejects weak points, and removes duplicate corners that are too close together.  </a:t>
+            </a:r>
+            <a:endParaRPr sz="1600" dirty="0">
+              <a:latin typeface="Acumin Pro" panose="020B0504020202020204" pitchFamily="34" charset="77"/>
+            </a:endParaRPr>
+          </a:p>
+        </p:txBody>
+      </p:sp>
+      <p:sp>
+        <p:nvSpPr>
+          <p:cNvPr id="10" name="Google Shape;21;g3e7c154889a_0_8">
+            <a:extLst>
+              <a:ext uri="{FF2B5EF4-FFF2-40B4-BE49-F238E27FC236}">
+                <a16:creationId xmlns:a16="http://schemas.microsoft.com/office/drawing/2014/main" id="{FD08C8EE-72B7-9FAA-61F2-D4F7A0FDA809}"/>
+              </a:ext>
+            </a:extLst>
+          </p:cNvPr>
+          <p:cNvSpPr txBox="1"/>
+          <p:nvPr/>
+        </p:nvSpPr>
+        <p:spPr>
+          <a:xfrm>
+            <a:off x="521442" y="3692013"/>
+            <a:ext cx="6831019" cy="1888500"/>
+          </a:xfrm>
+          <a:prstGeom prst="rect">
+            <a:avLst/>
+          </a:prstGeom>
+          <a:noFill/>
+          <a:ln>
+            <a:noFill/>
+          </a:ln>
+        </p:spPr>
+        <p:txBody>
+          <a:bodyPr spcFirstLastPara="1" wrap="square" lIns="91425" tIns="91425" rIns="91425" bIns="91425" anchor="t" anchorCtr="0">
+            <a:noAutofit/>
+          </a:bodyPr>
+          <a:lstStyle/>
+          <a:p>
+            <a:r>
+              <a:rPr lang="en-US" sz="1600" u="sng" dirty="0">
+                <a:latin typeface="Acumin Pro" panose="020B0504020202020204" pitchFamily="34" charset="77"/>
+              </a:rPr>
+              <a:t>Lucas-Kanade Optical Flow:</a:t>
+            </a:r>
+            <a:endParaRPr sz="1600" u="sng" dirty="0">
+              <a:latin typeface="Acumin Pro" panose="020B0504020202020204" pitchFamily="34" charset="77"/>
+            </a:endParaRPr>
+          </a:p>
+          <a:p>
+            <a:r>
+              <a:rPr lang="en-US" sz="1600" dirty="0">
+                <a:latin typeface="Acumin Pro" panose="020B0504020202020204" pitchFamily="34" charset="77"/>
+              </a:rPr>
+              <a:t>The method tracks each corner by comparing the previous and current frame. It looks at how the pixel brightness changes, estimates how far the corner moved, and rejects areas that are too flat or lack texture. The final result is a motion vector (dx, </a:t>
+            </a:r>
+            <a:r>
+              <a:rPr lang="en-US" sz="1600" dirty="0" err="1">
+                <a:latin typeface="Acumin Pro" panose="020B0504020202020204" pitchFamily="34" charset="77"/>
+              </a:rPr>
+              <a:t>dy</a:t>
+            </a:r>
+            <a:r>
+              <a:rPr lang="en-US" sz="1600" dirty="0">
+                <a:latin typeface="Acumin Pro" panose="020B0504020202020204" pitchFamily="34" charset="77"/>
+              </a:rPr>
+              <a:t>) for each corner, showing how much it moved between frames. </a:t>
+            </a:r>
+            <a:endParaRPr sz="1600" dirty="0">
+              <a:latin typeface="Acumin Pro" panose="020B0504020202020204" pitchFamily="34" charset="77"/>
+            </a:endParaRPr>
+          </a:p>
+        </p:txBody>
+      </p:sp>
+      <p:sp>
+        <p:nvSpPr>
+          <p:cNvPr id="11" name="Google Shape;22;g3e7c154889a_0_8">
+            <a:extLst>
+              <a:ext uri="{FF2B5EF4-FFF2-40B4-BE49-F238E27FC236}">
+                <a16:creationId xmlns:a16="http://schemas.microsoft.com/office/drawing/2014/main" id="{D02F9FE7-E626-A6B4-308D-DD98620A4FA4}"/>
+              </a:ext>
+            </a:extLst>
+          </p:cNvPr>
+          <p:cNvSpPr txBox="1"/>
+          <p:nvPr/>
+        </p:nvSpPr>
+        <p:spPr>
+          <a:xfrm>
+            <a:off x="8237168" y="4755272"/>
+            <a:ext cx="4598100" cy="733800"/>
+          </a:xfrm>
+          <a:prstGeom prst="rect">
+            <a:avLst/>
+          </a:prstGeom>
+          <a:noFill/>
+          <a:ln>
+            <a:noFill/>
+          </a:ln>
+        </p:spPr>
+        <p:txBody>
+          <a:bodyPr spcFirstLastPara="1" wrap="square" lIns="91425" tIns="91425" rIns="91425" bIns="91425" anchor="t" anchorCtr="0">
+            <a:spAutoFit/>
+          </a:bodyPr>
+          <a:lstStyle/>
+          <a:p>
+            <a:pPr marL="0" lvl="0" indent="0" algn="l" rtl="0">
+              <a:spcBef>
+                <a:spcPts val="200"/>
+              </a:spcBef>
+              <a:spcAft>
+                <a:spcPts val="0"/>
+              </a:spcAft>
+              <a:buNone/>
+            </a:pPr>
+            <a:r>
+              <a:rPr lang="en-US" sz="1000" dirty="0"/>
+              <a:t>Outputs direction:</a:t>
+            </a:r>
+            <a:endParaRPr sz="1000" dirty="0"/>
+          </a:p>
+          <a:p>
+            <a:pPr marL="457200" lvl="0" indent="-304800" algn="l" rtl="0">
+              <a:spcBef>
+                <a:spcPts val="200"/>
+              </a:spcBef>
+              <a:spcAft>
+                <a:spcPts val="0"/>
+              </a:spcAft>
+              <a:buSzPts val="1200"/>
+              <a:buChar char="-"/>
+            </a:pPr>
+            <a:r>
+              <a:rPr lang="en-US" sz="1000" dirty="0"/>
+              <a:t>FORWARD / LEFT / RIGHT / BACKWARD / STATIONARY </a:t>
+            </a:r>
+            <a:endParaRPr sz="1000" dirty="0"/>
+          </a:p>
+          <a:p>
+            <a:pPr marL="457200" lvl="0" indent="-304800" algn="l" rtl="0">
+              <a:spcBef>
+                <a:spcPts val="0"/>
+              </a:spcBef>
+              <a:spcAft>
+                <a:spcPts val="0"/>
+              </a:spcAft>
+              <a:buSzPts val="1200"/>
+              <a:buChar char="-"/>
+            </a:pPr>
+            <a:r>
+              <a:rPr lang="en-US" sz="1000" dirty="0"/>
+              <a:t>Confidence value</a:t>
+            </a:r>
+            <a:endParaRPr sz="1000" dirty="0"/>
+          </a:p>
+        </p:txBody>
+      </p:sp>
+    </p:spTree>
+    <p:extLst>
+      <p:ext uri="{BB962C8B-B14F-4D97-AF65-F5344CB8AC3E}">
+        <p14:creationId xmlns:p14="http://schemas.microsoft.com/office/powerpoint/2010/main" val="2022222020"/>
+      </p:ext>
+    </p:extLst>
+  </p:cSld>
+  <p:clrMapOvr>
+    <a:masterClrMapping/>
+  </p:clrMapOvr>
+</p:sld>
+</file>
+
+<file path=ppt/slides/slide6.xml><?xml version="1.0" encoding="utf-8"?>
+<p:sld xmlns:a="http://schemas.openxmlformats.org/drawingml/2006/main" xmlns:r="http://schemas.openxmlformats.org/officeDocument/2006/relationships" xmlns:p="http://schemas.openxmlformats.org/presentationml/2006/main">
+  <p:cSld>
+    <p:spTree>
+      <p:nvGrpSpPr>
+        <p:cNvPr id="1" name="">
+          <a:extLst>
+            <a:ext uri="{FF2B5EF4-FFF2-40B4-BE49-F238E27FC236}">
+              <a16:creationId xmlns:a16="http://schemas.microsoft.com/office/drawing/2014/main" id="{D0251D6F-59B1-6E5F-77B2-1B7B2B0F07B2}"/>
+            </a:ext>
+          </a:extLst>
+        </p:cNvPr>
+        <p:cNvGrpSpPr/>
+        <p:nvPr/>
+      </p:nvGrpSpPr>
+      <p:grpSpPr>
+        <a:xfrm>
+          <a:off x="0" y="0"/>
+          <a:ext cx="0" cy="0"/>
+          <a:chOff x="0" y="0"/>
+          <a:chExt cx="0" cy="0"/>
+        </a:xfrm>
+      </p:grpSpPr>
+      <p:sp>
+        <p:nvSpPr>
+          <p:cNvPr id="2" name="Text Placeholder 1">
+            <a:extLst>
+              <a:ext uri="{FF2B5EF4-FFF2-40B4-BE49-F238E27FC236}">
+                <a16:creationId xmlns:a16="http://schemas.microsoft.com/office/drawing/2014/main" id="{58AC0A5B-F44A-9D9D-7393-E7E5430661B9}"/>
+              </a:ext>
+            </a:extLst>
+          </p:cNvPr>
+          <p:cNvSpPr>
+            <a:spLocks noGrp="1"/>
+          </p:cNvSpPr>
+          <p:nvPr>
+            <p:ph type="body" sz="quarter" idx="11"/>
+          </p:nvPr>
+        </p:nvSpPr>
+        <p:spPr/>
+        <p:txBody>
+          <a:bodyPr/>
+          <a:lstStyle/>
+          <a:p>
+            <a:endParaRPr lang="en-US"/>
+          </a:p>
+        </p:txBody>
+      </p:sp>
+      <p:sp>
+        <p:nvSpPr>
+          <p:cNvPr id="4" name="Title 3">
+            <a:extLst>
+              <a:ext uri="{FF2B5EF4-FFF2-40B4-BE49-F238E27FC236}">
+                <a16:creationId xmlns:a16="http://schemas.microsoft.com/office/drawing/2014/main" id="{E470CEAA-9717-CAEE-D32D-5A79C7D74943}"/>
+              </a:ext>
+            </a:extLst>
+          </p:cNvPr>
+          <p:cNvSpPr>
+            <a:spLocks noGrp="1"/>
+          </p:cNvSpPr>
+          <p:nvPr>
+            <p:ph type="title"/>
+          </p:nvPr>
+        </p:nvSpPr>
+        <p:spPr/>
+        <p:txBody>
+          <a:bodyPr>
+            <a:normAutofit fontScale="90000"/>
+          </a:bodyPr>
+          <a:lstStyle/>
+          <a:p>
+            <a:r>
+              <a:rPr lang="en-US" i="0" dirty="0"/>
+              <a:t>Extended Kalman Filter</a:t>
+            </a:r>
+            <a:endParaRPr lang="en-US" dirty="0"/>
+          </a:p>
+        </p:txBody>
+      </p:sp>
+      <p:pic>
+        <p:nvPicPr>
+          <p:cNvPr id="3" name="Picture 2" descr="A graph with a red line&#10;&#10;AI-generated content may be incorrect.">
+            <a:extLst>
+              <a:ext uri="{FF2B5EF4-FFF2-40B4-BE49-F238E27FC236}">
+                <a16:creationId xmlns:a16="http://schemas.microsoft.com/office/drawing/2014/main" id="{410EE815-6D62-4A09-C264-B0EC39C8F2D0}"/>
               </a:ext>
             </a:extLst>
           </p:cNvPr>
@@ -14704,8 +15223,8 @@
         </p:blipFill>
         <p:spPr>
           <a:xfrm>
-            <a:off x="1598636" y="1441334"/>
-            <a:ext cx="8983838" cy="4658685"/>
+            <a:off x="2209800" y="1097280"/>
+            <a:ext cx="7772400" cy="4663440"/>
           </a:xfrm>
           <a:prstGeom prst="rect">
             <a:avLst/>
@@ -14715,7 +15234,7 @@
     </p:spTree>
     <p:extLst>
       <p:ext uri="{BB962C8B-B14F-4D97-AF65-F5344CB8AC3E}">
-        <p14:creationId xmlns:p14="http://schemas.microsoft.com/office/powerpoint/2010/main" val="2469829648"/>
+        <p14:creationId xmlns:p14="http://schemas.microsoft.com/office/powerpoint/2010/main" val="2463646282"/>
       </p:ext>
     </p:extLst>
   </p:cSld>
@@ -14725,7 +15244,7 @@
 </p:sld>
 </file>
 
-<file path=ppt/slides/slide6.xml><?xml version="1.0" encoding="utf-8"?>
+<file path=ppt/slides/slide7.xml><?xml version="1.0" encoding="utf-8"?>
 <p:sld xmlns:a="http://schemas.openxmlformats.org/drawingml/2006/main" xmlns:r="http://schemas.openxmlformats.org/officeDocument/2006/relationships" xmlns:p="http://schemas.openxmlformats.org/presentationml/2006/main">
   <p:cSld>
     <p:spTree>
@@ -14941,6 +15460,37 @@
           </a:p>
         </p:txBody>
       </p:sp>
+      <p:pic>
+        <p:nvPicPr>
+          <p:cNvPr id="7" name="Picture 6" descr="A table with a drawing on it&#10;&#10;AI-generated content may be incorrect.">
+            <a:extLst>
+              <a:ext uri="{FF2B5EF4-FFF2-40B4-BE49-F238E27FC236}">
+                <a16:creationId xmlns:a16="http://schemas.microsoft.com/office/drawing/2014/main" id="{63045C88-AD81-1C8E-3E66-BD07CFD2285D}"/>
+              </a:ext>
+            </a:extLst>
+          </p:cNvPr>
+          <p:cNvPicPr>
+            <a:picLocks noChangeAspect="1"/>
+          </p:cNvPicPr>
+          <p:nvPr/>
+        </p:nvPicPr>
+        <p:blipFill>
+          <a:blip r:embed="rId2"/>
+          <a:srcRect l="13390" t="11532"/>
+          <a:stretch>
+            <a:fillRect/>
+          </a:stretch>
+        </p:blipFill>
+        <p:spPr>
+          <a:xfrm>
+            <a:off x="7455204" y="1629625"/>
+            <a:ext cx="4268708" cy="2452640"/>
+          </a:xfrm>
+          <a:prstGeom prst="rect">
+            <a:avLst/>
+          </a:prstGeom>
+        </p:spPr>
+      </p:pic>
     </p:spTree>
     <p:extLst>
       <p:ext uri="{BB962C8B-B14F-4D97-AF65-F5344CB8AC3E}">
@@ -14954,7 +15504,98 @@
 </p:sld>
 </file>
 
-<file path=ppt/slides/slide7.xml><?xml version="1.0" encoding="utf-8"?>
+<file path=ppt/slides/slide8.xml><?xml version="1.0" encoding="utf-8"?>
+<p:sld xmlns:a="http://schemas.openxmlformats.org/drawingml/2006/main" xmlns:r="http://schemas.openxmlformats.org/officeDocument/2006/relationships" xmlns:p="http://schemas.openxmlformats.org/presentationml/2006/main">
+  <p:cSld>
+    <p:spTree>
+      <p:nvGrpSpPr>
+        <p:cNvPr id="1" name="">
+          <a:extLst>
+            <a:ext uri="{FF2B5EF4-FFF2-40B4-BE49-F238E27FC236}">
+              <a16:creationId xmlns:a16="http://schemas.microsoft.com/office/drawing/2014/main" id="{1678BDB1-D4FA-3A8F-CCB6-E29A473B18CC}"/>
+            </a:ext>
+          </a:extLst>
+        </p:cNvPr>
+        <p:cNvGrpSpPr/>
+        <p:nvPr/>
+      </p:nvGrpSpPr>
+      <p:grpSpPr>
+        <a:xfrm>
+          <a:off x="0" y="0"/>
+          <a:ext cx="0" cy="0"/>
+          <a:chOff x="0" y="0"/>
+          <a:chExt cx="0" cy="0"/>
+        </a:xfrm>
+      </p:grpSpPr>
+      <p:sp>
+        <p:nvSpPr>
+          <p:cNvPr id="2" name="Text Placeholder 1">
+            <a:extLst>
+              <a:ext uri="{FF2B5EF4-FFF2-40B4-BE49-F238E27FC236}">
+                <a16:creationId xmlns:a16="http://schemas.microsoft.com/office/drawing/2014/main" id="{061A8E11-6AB0-85C2-75CC-4B8822E2BC0C}"/>
+              </a:ext>
+            </a:extLst>
+          </p:cNvPr>
+          <p:cNvSpPr>
+            <a:spLocks noGrp="1"/>
+          </p:cNvSpPr>
+          <p:nvPr>
+            <p:ph type="body" sz="quarter" idx="11"/>
+          </p:nvPr>
+        </p:nvSpPr>
+        <p:spPr/>
+        <p:txBody>
+          <a:bodyPr/>
+          <a:lstStyle/>
+          <a:p>
+            <a:endParaRPr lang="en-US"/>
+          </a:p>
+        </p:txBody>
+      </p:sp>
+      <p:sp>
+        <p:nvSpPr>
+          <p:cNvPr id="4" name="Title 3">
+            <a:extLst>
+              <a:ext uri="{FF2B5EF4-FFF2-40B4-BE49-F238E27FC236}">
+                <a16:creationId xmlns:a16="http://schemas.microsoft.com/office/drawing/2014/main" id="{6714517D-938F-AA15-96A0-878F2E328880}"/>
+              </a:ext>
+            </a:extLst>
+          </p:cNvPr>
+          <p:cNvSpPr>
+            <a:spLocks noGrp="1"/>
+          </p:cNvSpPr>
+          <p:nvPr>
+            <p:ph type="title"/>
+          </p:nvPr>
+        </p:nvSpPr>
+        <p:spPr/>
+        <p:txBody>
+          <a:bodyPr>
+            <a:normAutofit fontScale="90000"/>
+          </a:bodyPr>
+          <a:lstStyle/>
+          <a:p>
+            <a:r>
+              <a:rPr lang="en-US" dirty="0"/>
+              <a:t>Demo</a:t>
+            </a:r>
+          </a:p>
+        </p:txBody>
+      </p:sp>
+    </p:spTree>
+    <p:extLst>
+      <p:ext uri="{BB962C8B-B14F-4D97-AF65-F5344CB8AC3E}">
+        <p14:creationId xmlns:p14="http://schemas.microsoft.com/office/powerpoint/2010/main" val="962674886"/>
+      </p:ext>
+    </p:extLst>
+  </p:cSld>
+  <p:clrMapOvr>
+    <a:masterClrMapping/>
+  </p:clrMapOvr>
+</p:sld>
+</file>
+
+<file path=ppt/slides/slide9.xml><?xml version="1.0" encoding="utf-8"?>
 <p:sld xmlns:a="http://schemas.openxmlformats.org/drawingml/2006/main" xmlns:r="http://schemas.openxmlformats.org/officeDocument/2006/relationships" xmlns:p="http://schemas.openxmlformats.org/presentationml/2006/main">
   <p:cSld>
     <p:spTree>
@@ -15004,38 +15645,6 @@
       </p:sp>
       <p:sp>
         <p:nvSpPr>
-          <p:cNvPr id="3" name="Text Placeholder 2">
-            <a:extLst>
-              <a:ext uri="{FF2B5EF4-FFF2-40B4-BE49-F238E27FC236}">
-                <a16:creationId xmlns:a16="http://schemas.microsoft.com/office/drawing/2014/main" id="{064539B8-40AA-B2FE-2F81-C3BD625CF7D5}"/>
-              </a:ext>
-            </a:extLst>
-          </p:cNvPr>
-          <p:cNvSpPr>
-            <a:spLocks noGrp="1"/>
-          </p:cNvSpPr>
-          <p:nvPr>
-            <p:ph type="body" sz="quarter" idx="10"/>
-          </p:nvPr>
-        </p:nvSpPr>
-        <p:spPr/>
-        <p:txBody>
-          <a:bodyPr/>
-          <a:lstStyle/>
-          <a:p>
-            <a:pPr marL="742950" lvl="1" indent="-285750">
-              <a:spcAft>
-                <a:spcPct val="0"/>
-              </a:spcAft>
-              <a:buFont typeface="Arial" panose="020B0604020202020204" pitchFamily="34" charset="0"/>
-              <a:buChar char="•"/>
-            </a:pPr>
-            <a:endParaRPr lang="en-US" dirty="0"/>
-          </a:p>
-        </p:txBody>
-      </p:sp>
-      <p:sp>
-        <p:nvSpPr>
           <p:cNvPr id="4" name="Title 3">
             <a:extLst>
               <a:ext uri="{FF2B5EF4-FFF2-40B4-BE49-F238E27FC236}">
@@ -15066,10 +15675,10 @@
       </p:sp>
       <p:pic>
         <p:nvPicPr>
-          <p:cNvPr id="6" name="Picture 5" descr="A table with text and numbers&#10;&#10;AI-generated content may be incorrect.">
-            <a:extLst>
-              <a:ext uri="{FF2B5EF4-FFF2-40B4-BE49-F238E27FC236}">
-                <a16:creationId xmlns:a16="http://schemas.microsoft.com/office/drawing/2014/main" id="{6B53C7B0-6225-629A-9953-31B56C7C37E0}"/>
+          <p:cNvPr id="7" name="Picture 6" descr="A table with numbers and symbols&#10;&#10;AI-generated content may be incorrect.">
+            <a:extLst>
+              <a:ext uri="{FF2B5EF4-FFF2-40B4-BE49-F238E27FC236}">
+                <a16:creationId xmlns:a16="http://schemas.microsoft.com/office/drawing/2014/main" id="{241CC9F9-1294-E99C-D8D3-17C75C000E36}"/>
               </a:ext>
             </a:extLst>
           </p:cNvPr>
@@ -15086,8 +15695,8 @@
         </p:blipFill>
         <p:spPr>
           <a:xfrm>
-            <a:off x="1332469" y="2219796"/>
-            <a:ext cx="9527062" cy="2418407"/>
+            <a:off x="1222791" y="2253142"/>
+            <a:ext cx="9746417" cy="2351715"/>
           </a:xfrm>
           <a:prstGeom prst="rect">
             <a:avLst/>
@@ -15098,402 +15707,6 @@
     <p:extLst>
       <p:ext uri="{BB962C8B-B14F-4D97-AF65-F5344CB8AC3E}">
         <p14:creationId xmlns:p14="http://schemas.microsoft.com/office/powerpoint/2010/main" val="1720613204"/>
-      </p:ext>
-    </p:extLst>
-  </p:cSld>
-  <p:clrMapOvr>
-    <a:masterClrMapping/>
-  </p:clrMapOvr>
-</p:sld>
-</file>
-
-<file path=ppt/slides/slide8.xml><?xml version="1.0" encoding="utf-8"?>
-<p:sld xmlns:a="http://schemas.openxmlformats.org/drawingml/2006/main" xmlns:r="http://schemas.openxmlformats.org/officeDocument/2006/relationships" xmlns:p="http://schemas.openxmlformats.org/presentationml/2006/main">
-  <p:cSld>
-    <p:spTree>
-      <p:nvGrpSpPr>
-        <p:cNvPr id="1" name="">
-          <a:extLst>
-            <a:ext uri="{FF2B5EF4-FFF2-40B4-BE49-F238E27FC236}">
-              <a16:creationId xmlns:a16="http://schemas.microsoft.com/office/drawing/2014/main" id="{C7DA1A4C-7218-BFD4-6B64-9AD0FB86795D}"/>
-            </a:ext>
-          </a:extLst>
-        </p:cNvPr>
-        <p:cNvGrpSpPr/>
-        <p:nvPr/>
-      </p:nvGrpSpPr>
-      <p:grpSpPr>
-        <a:xfrm>
-          <a:off x="0" y="0"/>
-          <a:ext cx="0" cy="0"/>
-          <a:chOff x="0" y="0"/>
-          <a:chExt cx="0" cy="0"/>
-        </a:xfrm>
-      </p:grpSpPr>
-      <p:sp>
-        <p:nvSpPr>
-          <p:cNvPr id="2" name="Content Placeholder 1">
-            <a:extLst>
-              <a:ext uri="{FF2B5EF4-FFF2-40B4-BE49-F238E27FC236}">
-                <a16:creationId xmlns:a16="http://schemas.microsoft.com/office/drawing/2014/main" id="{B6750C12-49D6-1347-51E2-B73BC1455D0E}"/>
-              </a:ext>
-            </a:extLst>
-          </p:cNvPr>
-          <p:cNvSpPr>
-            <a:spLocks noGrp="1"/>
-          </p:cNvSpPr>
-          <p:nvPr>
-            <p:ph idx="14"/>
-          </p:nvPr>
-        </p:nvSpPr>
-        <p:spPr/>
-        <p:txBody>
-          <a:bodyPr/>
-          <a:lstStyle/>
-          <a:p>
-            <a:pPr marL="57150" lvl="0" fontAlgn="base">
-              <a:spcAft>
-                <a:spcPct val="0"/>
-              </a:spcAft>
-            </a:pPr>
-            <a:r>
-              <a:rPr lang="en-US" altLang="en-US" sz="1600" dirty="0"/>
-              <a:t>Scale ambiguity: monocular vision can't recover metric scale alone </a:t>
-            </a:r>
-          </a:p>
-          <a:p>
-            <a:pPr marL="57150" lvl="0" fontAlgn="base">
-              <a:spcAft>
-                <a:spcPct val="0"/>
-              </a:spcAft>
-            </a:pPr>
-            <a:r>
-              <a:rPr lang="en-US" altLang="en-US" sz="1600" dirty="0"/>
-              <a:t>Compute wall: SVD, Essential matrices, RANSAC don't fit a 240 MHz dual core </a:t>
-            </a:r>
-          </a:p>
-          <a:p>
-            <a:pPr marL="57150" lvl="0" fontAlgn="base">
-              <a:spcAft>
-                <a:spcPct val="0"/>
-              </a:spcAft>
-            </a:pPr>
-            <a:r>
-              <a:rPr lang="en-US" altLang="en-US" sz="1600" dirty="0"/>
-              <a:t>Drift wall: MEMS gyro bias is the silent killer — drift is quadratic in time </a:t>
-            </a:r>
-          </a:p>
-          <a:p>
-            <a:pPr marL="57150" lvl="0" fontAlgn="base">
-              <a:spcAft>
-                <a:spcPct val="0"/>
-              </a:spcAft>
-            </a:pPr>
-            <a:r>
-              <a:rPr lang="en-US" altLang="en-US" sz="1600" dirty="0"/>
-              <a:t>Pure IMU dead-reckoning fails after a few seconds; pure vision fails on scale</a:t>
-            </a:r>
-          </a:p>
-          <a:p>
-            <a:endParaRPr lang="en-US" dirty="0"/>
-          </a:p>
-        </p:txBody>
-      </p:sp>
-      <p:sp>
-        <p:nvSpPr>
-          <p:cNvPr id="3" name="Title 2">
-            <a:extLst>
-              <a:ext uri="{FF2B5EF4-FFF2-40B4-BE49-F238E27FC236}">
-                <a16:creationId xmlns:a16="http://schemas.microsoft.com/office/drawing/2014/main" id="{CBF81B92-137C-EFBC-0966-1600D83E547E}"/>
-              </a:ext>
-            </a:extLst>
-          </p:cNvPr>
-          <p:cNvSpPr>
-            <a:spLocks noGrp="1"/>
-          </p:cNvSpPr>
-          <p:nvPr>
-            <p:ph type="title"/>
-          </p:nvPr>
-        </p:nvSpPr>
-        <p:spPr/>
-        <p:txBody>
-          <a:bodyPr>
-            <a:normAutofit fontScale="90000"/>
-          </a:bodyPr>
-          <a:lstStyle/>
-          <a:p>
-            <a:r>
-              <a:rPr lang="en-US" dirty="0"/>
-              <a:t>Hardware Constrains</a:t>
-            </a:r>
-          </a:p>
-        </p:txBody>
-      </p:sp>
-      <p:sp>
-        <p:nvSpPr>
-          <p:cNvPr id="4" name="Text Placeholder 3">
-            <a:extLst>
-              <a:ext uri="{FF2B5EF4-FFF2-40B4-BE49-F238E27FC236}">
-                <a16:creationId xmlns:a16="http://schemas.microsoft.com/office/drawing/2014/main" id="{A6629CAF-F75B-F337-33BA-C2DA23E3199A}"/>
-              </a:ext>
-            </a:extLst>
-          </p:cNvPr>
-          <p:cNvSpPr>
-            <a:spLocks noGrp="1"/>
-          </p:cNvSpPr>
-          <p:nvPr>
-            <p:ph type="body" sz="quarter" idx="11"/>
-          </p:nvPr>
-        </p:nvSpPr>
-        <p:spPr/>
-        <p:txBody>
-          <a:bodyPr/>
-          <a:lstStyle/>
-          <a:p>
-            <a:endParaRPr lang="en-US"/>
-          </a:p>
-        </p:txBody>
-      </p:sp>
-      <p:sp>
-        <p:nvSpPr>
-          <p:cNvPr id="5" name="Footer Placeholder 4">
-            <a:extLst>
-              <a:ext uri="{FF2B5EF4-FFF2-40B4-BE49-F238E27FC236}">
-                <a16:creationId xmlns:a16="http://schemas.microsoft.com/office/drawing/2014/main" id="{A21A1860-DC4E-8C8B-746E-D41E8F6CEEE9}"/>
-              </a:ext>
-            </a:extLst>
-          </p:cNvPr>
-          <p:cNvSpPr>
-            <a:spLocks noGrp="1"/>
-          </p:cNvSpPr>
-          <p:nvPr>
-            <p:ph type="ftr" sz="quarter" idx="15"/>
-          </p:nvPr>
-        </p:nvSpPr>
-        <p:spPr/>
-        <p:txBody>
-          <a:bodyPr/>
-          <a:lstStyle/>
-          <a:p>
-            <a:pPr algn="r"/>
-            <a:r>
-              <a:rPr lang="en-US"/>
-              <a:t>3/31/23            ‹#›</a:t>
-            </a:r>
-            <a:endParaRPr lang="en-US" dirty="0"/>
-          </a:p>
-        </p:txBody>
-      </p:sp>
-    </p:spTree>
-    <p:extLst>
-      <p:ext uri="{BB962C8B-B14F-4D97-AF65-F5344CB8AC3E}">
-        <p14:creationId xmlns:p14="http://schemas.microsoft.com/office/powerpoint/2010/main" val="3281092672"/>
-      </p:ext>
-    </p:extLst>
-  </p:cSld>
-  <p:clrMapOvr>
-    <a:masterClrMapping/>
-  </p:clrMapOvr>
-</p:sld>
-</file>
-
-<file path=ppt/slides/slide9.xml><?xml version="1.0" encoding="utf-8"?>
-<p:sld xmlns:a="http://schemas.openxmlformats.org/drawingml/2006/main" xmlns:r="http://schemas.openxmlformats.org/officeDocument/2006/relationships" xmlns:p="http://schemas.openxmlformats.org/presentationml/2006/main">
-  <p:cSld>
-    <p:spTree>
-      <p:nvGrpSpPr>
-        <p:cNvPr id="1" name="">
-          <a:extLst>
-            <a:ext uri="{FF2B5EF4-FFF2-40B4-BE49-F238E27FC236}">
-              <a16:creationId xmlns:a16="http://schemas.microsoft.com/office/drawing/2014/main" id="{67A0456B-2C30-6344-D744-EB0E6749858B}"/>
-            </a:ext>
-          </a:extLst>
-        </p:cNvPr>
-        <p:cNvGrpSpPr/>
-        <p:nvPr/>
-      </p:nvGrpSpPr>
-      <p:grpSpPr>
-        <a:xfrm>
-          <a:off x="0" y="0"/>
-          <a:ext cx="0" cy="0"/>
-          <a:chOff x="0" y="0"/>
-          <a:chExt cx="0" cy="0"/>
-        </a:xfrm>
-      </p:grpSpPr>
-      <p:sp>
-        <p:nvSpPr>
-          <p:cNvPr id="2" name="Content Placeholder 1">
-            <a:extLst>
-              <a:ext uri="{FF2B5EF4-FFF2-40B4-BE49-F238E27FC236}">
-                <a16:creationId xmlns:a16="http://schemas.microsoft.com/office/drawing/2014/main" id="{F6ABB363-A8B0-F3B5-A24C-31B6499B9FC4}"/>
-              </a:ext>
-            </a:extLst>
-          </p:cNvPr>
-          <p:cNvSpPr>
-            <a:spLocks noGrp="1"/>
-          </p:cNvSpPr>
-          <p:nvPr>
-            <p:ph idx="14"/>
-          </p:nvPr>
-        </p:nvSpPr>
-        <p:spPr/>
-        <p:txBody>
-          <a:bodyPr/>
-          <a:lstStyle/>
-          <a:p>
-            <a:r>
-              <a:rPr lang="en-US" dirty="0"/>
-              <a:t>Done:</a:t>
-            </a:r>
-          </a:p>
-          <a:p>
-            <a:pPr marL="457200" lvl="1" indent="0">
-              <a:buNone/>
-            </a:pPr>
-            <a:r>
-              <a:rPr lang="en-US" dirty="0"/>
-              <a:t>✓ End-to-end VIO on bare-metal ESP32-S3</a:t>
-            </a:r>
-          </a:p>
-          <a:p>
-            <a:pPr marL="457200" lvl="1" indent="0">
-              <a:buNone/>
-            </a:pPr>
-            <a:r>
-              <a:rPr lang="en-US" dirty="0"/>
-              <a:t>✓ IPM + gyro </a:t>
-            </a:r>
-            <a:r>
-              <a:rPr lang="en-US" dirty="0" err="1"/>
-              <a:t>derotation</a:t>
-            </a:r>
-            <a:r>
-              <a:rPr lang="en-US" dirty="0"/>
-              <a:t> + planar EKF</a:t>
-            </a:r>
-          </a:p>
-          <a:p>
-            <a:pPr marL="457200" lvl="1" indent="0">
-              <a:buNone/>
-            </a:pPr>
-            <a:r>
-              <a:rPr lang="en-US" dirty="0"/>
-              <a:t>✓ Drift bounded on closed-loop trajectories where IMU-only diverges</a:t>
-            </a:r>
-          </a:p>
-          <a:p>
-            <a:r>
-              <a:rPr lang="en-US" dirty="0"/>
-              <a:t>Future Steps:</a:t>
-            </a:r>
-          </a:p>
-          <a:p>
-            <a:pPr marL="457200" lvl="1" indent="0">
-              <a:buNone/>
-            </a:pPr>
-            <a:r>
-              <a:rPr lang="en-US" dirty="0" err="1"/>
-              <a:t>TinyML</a:t>
-            </a:r>
-            <a:r>
-              <a:rPr lang="en-US" dirty="0"/>
-              <a:t> motion-class auxiliary channel (Edge Impulse) for adaptive filter tuning</a:t>
-            </a:r>
-          </a:p>
-          <a:p>
-            <a:endParaRPr lang="en-US" dirty="0"/>
-          </a:p>
-        </p:txBody>
-      </p:sp>
-      <p:sp>
-        <p:nvSpPr>
-          <p:cNvPr id="3" name="Title 2">
-            <a:extLst>
-              <a:ext uri="{FF2B5EF4-FFF2-40B4-BE49-F238E27FC236}">
-                <a16:creationId xmlns:a16="http://schemas.microsoft.com/office/drawing/2014/main" id="{5A1044F4-3019-3C3C-880C-BC98AF9E9A08}"/>
-              </a:ext>
-            </a:extLst>
-          </p:cNvPr>
-          <p:cNvSpPr>
-            <a:spLocks noGrp="1"/>
-          </p:cNvSpPr>
-          <p:nvPr>
-            <p:ph type="title"/>
-          </p:nvPr>
-        </p:nvSpPr>
-        <p:spPr/>
-        <p:txBody>
-          <a:bodyPr>
-            <a:normAutofit fontScale="90000"/>
-          </a:bodyPr>
-          <a:lstStyle/>
-          <a:p>
-            <a:r>
-              <a:rPr lang="en-US" dirty="0"/>
-              <a:t>Conclusion and Future Steps</a:t>
-            </a:r>
-          </a:p>
-        </p:txBody>
-      </p:sp>
-      <p:sp>
-        <p:nvSpPr>
-          <p:cNvPr id="4" name="Text Placeholder 3">
-            <a:extLst>
-              <a:ext uri="{FF2B5EF4-FFF2-40B4-BE49-F238E27FC236}">
-                <a16:creationId xmlns:a16="http://schemas.microsoft.com/office/drawing/2014/main" id="{FF3F1CDA-3388-B0FB-9DF2-03E80E28047A}"/>
-              </a:ext>
-            </a:extLst>
-          </p:cNvPr>
-          <p:cNvSpPr>
-            <a:spLocks noGrp="1"/>
-          </p:cNvSpPr>
-          <p:nvPr>
-            <p:ph type="body" sz="quarter" idx="11"/>
-          </p:nvPr>
-        </p:nvSpPr>
-        <p:spPr/>
-        <p:txBody>
-          <a:bodyPr/>
-          <a:lstStyle/>
-          <a:p>
-            <a:endParaRPr lang="en-US"/>
-          </a:p>
-        </p:txBody>
-      </p:sp>
-      <p:sp>
-        <p:nvSpPr>
-          <p:cNvPr id="5" name="Footer Placeholder 4">
-            <a:extLst>
-              <a:ext uri="{FF2B5EF4-FFF2-40B4-BE49-F238E27FC236}">
-                <a16:creationId xmlns:a16="http://schemas.microsoft.com/office/drawing/2014/main" id="{4087B2BF-EC4B-BA59-D41D-0E85969FE5E2}"/>
-              </a:ext>
-            </a:extLst>
-          </p:cNvPr>
-          <p:cNvSpPr>
-            <a:spLocks noGrp="1"/>
-          </p:cNvSpPr>
-          <p:nvPr>
-            <p:ph type="ftr" sz="quarter" idx="15"/>
-          </p:nvPr>
-        </p:nvSpPr>
-        <p:spPr/>
-        <p:txBody>
-          <a:bodyPr/>
-          <a:lstStyle/>
-          <a:p>
-            <a:pPr algn="r"/>
-            <a:r>
-              <a:rPr lang="en-US"/>
-              <a:t>3/31/23            ‹#›</a:t>
-            </a:r>
-            <a:endParaRPr lang="en-US" dirty="0"/>
-          </a:p>
-        </p:txBody>
-      </p:sp>
-    </p:spTree>
-    <p:extLst>
-      <p:ext uri="{BB962C8B-B14F-4D97-AF65-F5344CB8AC3E}">
-        <p14:creationId xmlns:p14="http://schemas.microsoft.com/office/powerpoint/2010/main" val="404975220"/>
       </p:ext>
     </p:extLst>
   </p:cSld>
@@ -16086,6 +16299,15 @@
 </file>
 
 <file path=customXml/item1.xml><?xml version="1.0" encoding="utf-8"?>
+<?mso-contentType ?>
+<FormTemplates xmlns="http://schemas.microsoft.com/sharepoint/v3/contenttype/forms">
+  <Display>DocumentLibraryForm</Display>
+  <Edit>DocumentLibraryForm</Edit>
+  <New>DocumentLibraryForm</New>
+</FormTemplates>
+</file>
+
+<file path=customXml/item2.xml><?xml version="1.0" encoding="utf-8"?>
 <ct:contentTypeSchema xmlns:ct="http://schemas.microsoft.com/office/2006/metadata/contentType" xmlns:ma="http://schemas.microsoft.com/office/2006/metadata/properties/metaAttributes" ct:_="" ma:_="" ma:contentTypeName="Document" ma:contentTypeID="0x01010054E202481DC1CB46AA011D949D311478" ma:contentTypeVersion="13" ma:contentTypeDescription="Create a new document." ma:contentTypeScope="" ma:versionID="309c718596e4092f54ce9aa93358bb8d">
   <xsd:schema xmlns:xsd="http://www.w3.org/2001/XMLSchema" xmlns:xs="http://www.w3.org/2001/XMLSchema" xmlns:p="http://schemas.microsoft.com/office/2006/metadata/properties" xmlns:ns2="37af3f4b-4b66-46f9-8456-831d9bc3e737" xmlns:ns3="d6656b4d-3fa0-4709-acfb-d5e813445d1e" targetNamespace="http://schemas.microsoft.com/office/2006/metadata/properties" ma:root="true" ma:fieldsID="0c34f3e70276db9d2471c2526b8de3df" ns2:_="" ns3:_="">
     <xsd:import namespace="37af3f4b-4b66-46f9-8456-831d9bc3e737"/>
@@ -16308,15 +16530,6 @@
 </ct:contentTypeSchema>
 </file>
 
-<file path=customXml/item2.xml><?xml version="1.0" encoding="utf-8"?>
-<?mso-contentType ?>
-<FormTemplates xmlns="http://schemas.microsoft.com/sharepoint/v3/contenttype/forms">
-  <Display>DocumentLibraryForm</Display>
-  <Edit>DocumentLibraryForm</Edit>
-  <New>DocumentLibraryForm</New>
-</FormTemplates>
-</file>
-
 <file path=customXml/item3.xml><?xml version="1.0" encoding="utf-8"?>
 <p:properties xmlns:p="http://schemas.microsoft.com/office/2006/metadata/properties" xmlns:xsi="http://www.w3.org/2001/XMLSchema-instance" xmlns:pc="http://schemas.microsoft.com/office/infopath/2007/PartnerControls">
   <documentManagement>
@@ -16361,6 +16574,14 @@
 </file>
 
 <file path=customXml/itemProps1.xml><?xml version="1.0" encoding="utf-8"?>
+<ds:datastoreItem xmlns:ds="http://schemas.openxmlformats.org/officeDocument/2006/customXml" ds:itemID="{F5B64EEB-1B4A-4920-AA44-E234D7D487D1}">
+  <ds:schemaRefs>
+    <ds:schemaRef ds:uri="http://schemas.microsoft.com/sharepoint/v3/contenttype/forms"/>
+  </ds:schemaRefs>
+</ds:datastoreItem>
+</file>
+
+<file path=customXml/itemProps2.xml><?xml version="1.0" encoding="utf-8"?>
 <ds:datastoreItem xmlns:ds="http://schemas.openxmlformats.org/officeDocument/2006/customXml" ds:itemID="{64D795B0-FAA0-424A-9B96-7691ED1EF26B}">
   <ds:schemaRefs>
     <ds:schemaRef ds:uri="http://schemas.microsoft.com/office/2006/metadata/contentType"/>
@@ -16375,14 +16596,6 @@
     <ds:schemaRef ds:uri="http://purl.org/dc/elements/1.1/"/>
     <ds:schemaRef ds:uri="http://purl.org/dc/terms/"/>
     <ds:schemaRef ds:uri="http://schemas.microsoft.com/internal/obd"/>
-  </ds:schemaRefs>
-</ds:datastoreItem>
-</file>
-
-<file path=customXml/itemProps2.xml><?xml version="1.0" encoding="utf-8"?>
-<ds:datastoreItem xmlns:ds="http://schemas.openxmlformats.org/officeDocument/2006/customXml" ds:itemID="{F5B64EEB-1B4A-4920-AA44-E234D7D487D1}">
-  <ds:schemaRefs>
-    <ds:schemaRef ds:uri="http://schemas.microsoft.com/sharepoint/v3/contenttype/forms"/>
   </ds:schemaRefs>
 </ds:datastoreItem>
 </file>
